--- a/Reporte 210926.pptx
+++ b/Reporte 210926.pptx
@@ -5,7 +5,7 @@
     <p:sldMasterId id="2147483672" r:id="rId1"/>
   </p:sldMasterIdLst>
   <p:notesMasterIdLst>
-    <p:notesMasterId r:id="rId18"/>
+    <p:notesMasterId r:id="rId19"/>
   </p:notesMasterIdLst>
   <p:sldIdLst>
     <p:sldId id="350" r:id="rId2"/>
@@ -23,22 +23,23 @@
     <p:sldId id="412" r:id="rId14"/>
     <p:sldId id="371" r:id="rId15"/>
     <p:sldId id="413" r:id="rId16"/>
-    <p:sldId id="280" r:id="rId17"/>
+    <p:sldId id="414" r:id="rId17"/>
+    <p:sldId id="280" r:id="rId18"/>
   </p:sldIdLst>
   <p:sldSz cx="9144000" cy="5143500" type="screen16x9"/>
   <p:notesSz cx="6858000" cy="9144000"/>
   <p:embeddedFontLst>
     <p:embeddedFont>
       <p:font typeface="Montserrat" panose="00000500000000000000" pitchFamily="2" charset="0"/>
-      <p:regular r:id="rId19"/>
-      <p:bold r:id="rId20"/>
-      <p:italic r:id="rId21"/>
-      <p:boldItalic r:id="rId22"/>
+      <p:regular r:id="rId20"/>
+      <p:bold r:id="rId21"/>
+      <p:italic r:id="rId22"/>
+      <p:boldItalic r:id="rId23"/>
     </p:embeddedFont>
     <p:embeddedFont>
       <p:font typeface="Montserrat Black" panose="00000A00000000000000" pitchFamily="2" charset="0"/>
-      <p:bold r:id="rId23"/>
-      <p:boldItalic r:id="rId24"/>
+      <p:bold r:id="rId24"/>
+      <p:boldItalic r:id="rId25"/>
     </p:embeddedFont>
   </p:embeddedFontLst>
   <p:defaultTextStyle>
@@ -6680,10 +6681,10 @@
       </p:sp>
       <p:pic>
         <p:nvPicPr>
-          <p:cNvPr id="4" name="Imagen 3">
+          <p:cNvPr id="3" name="Imagen 2">
             <a:extLst>
               <a:ext uri="{FF2B5EF4-FFF2-40B4-BE49-F238E27FC236}">
-                <a16:creationId xmlns:a16="http://schemas.microsoft.com/office/drawing/2014/main" id="{60337745-77D5-BB5D-C96E-337A176E09EB}"/>
+                <a16:creationId xmlns:a16="http://schemas.microsoft.com/office/drawing/2014/main" id="{CA87009F-7B35-C28C-DB45-6CD164A94D85}"/>
               </a:ext>
             </a:extLst>
           </p:cNvPr>
@@ -6700,8 +6701,8 @@
         </p:blipFill>
         <p:spPr>
           <a:xfrm>
-            <a:off x="0" y="1194208"/>
-            <a:ext cx="9144000" cy="2897960"/>
+            <a:off x="0" y="1175161"/>
+            <a:ext cx="9144000" cy="2936053"/>
           </a:xfrm>
           <a:prstGeom prst="rect">
             <a:avLst/>
@@ -6786,10 +6787,10 @@
       </p:sp>
       <p:pic>
         <p:nvPicPr>
-          <p:cNvPr id="4" name="Imagen 3">
+          <p:cNvPr id="5" name="Imagen 4">
             <a:extLst>
               <a:ext uri="{FF2B5EF4-FFF2-40B4-BE49-F238E27FC236}">
-                <a16:creationId xmlns:a16="http://schemas.microsoft.com/office/drawing/2014/main" id="{621D92DE-5F89-78E8-8797-F62C130DCCB7}"/>
+                <a16:creationId xmlns:a16="http://schemas.microsoft.com/office/drawing/2014/main" id="{DE760C23-D5CE-F5B7-8B5E-8B7A8E0DFC9A}"/>
               </a:ext>
             </a:extLst>
           </p:cNvPr>
@@ -6806,8 +6807,8 @@
         </p:blipFill>
         <p:spPr>
           <a:xfrm>
-            <a:off x="0" y="467477"/>
-            <a:ext cx="9144000" cy="4351421"/>
+            <a:off x="-6725" y="586625"/>
+            <a:ext cx="9144000" cy="4113125"/>
           </a:xfrm>
           <a:prstGeom prst="rect">
             <a:avLst/>
@@ -6892,10 +6893,10 @@
       </p:sp>
       <p:pic>
         <p:nvPicPr>
-          <p:cNvPr id="4" name="Imagen 3">
+          <p:cNvPr id="3" name="Imagen 2">
             <a:extLst>
               <a:ext uri="{FF2B5EF4-FFF2-40B4-BE49-F238E27FC236}">
-                <a16:creationId xmlns:a16="http://schemas.microsoft.com/office/drawing/2014/main" id="{25FDE4C4-2047-644B-5AEA-8BF8EEDE0E48}"/>
+                <a16:creationId xmlns:a16="http://schemas.microsoft.com/office/drawing/2014/main" id="{BF378058-44B0-49E1-DDCD-BC64D61B993B}"/>
               </a:ext>
             </a:extLst>
           </p:cNvPr>
@@ -6912,8 +6913,8 @@
         </p:blipFill>
         <p:spPr>
           <a:xfrm>
-            <a:off x="0" y="1185671"/>
-            <a:ext cx="9144000" cy="2915034"/>
+            <a:off x="0" y="1465282"/>
+            <a:ext cx="9144000" cy="2355811"/>
           </a:xfrm>
           <a:prstGeom prst="rect">
             <a:avLst/>
@@ -6998,10 +6999,10 @@
       </p:sp>
       <p:pic>
         <p:nvPicPr>
-          <p:cNvPr id="4" name="Imagen 3">
+          <p:cNvPr id="3" name="Imagen 2">
             <a:extLst>
               <a:ext uri="{FF2B5EF4-FFF2-40B4-BE49-F238E27FC236}">
-                <a16:creationId xmlns:a16="http://schemas.microsoft.com/office/drawing/2014/main" id="{6BE9C89C-F34E-37E0-775B-92D7D925031E}"/>
+                <a16:creationId xmlns:a16="http://schemas.microsoft.com/office/drawing/2014/main" id="{70CBEC9B-A009-DE50-3B17-F3D88586BC3A}"/>
               </a:ext>
             </a:extLst>
           </p:cNvPr>
@@ -7018,8 +7019,8 @@
         </p:blipFill>
         <p:spPr>
           <a:xfrm>
-            <a:off x="0" y="576646"/>
-            <a:ext cx="9144000" cy="4393407"/>
+            <a:off x="0" y="464344"/>
+            <a:ext cx="9144000" cy="4357687"/>
           </a:xfrm>
           <a:prstGeom prst="rect">
             <a:avLst/>
@@ -7110,10 +7111,10 @@
       </p:sp>
       <p:pic>
         <p:nvPicPr>
-          <p:cNvPr id="4" name="Imagen 3">
+          <p:cNvPr id="3" name="Imagen 2">
             <a:extLst>
               <a:ext uri="{FF2B5EF4-FFF2-40B4-BE49-F238E27FC236}">
-                <a16:creationId xmlns:a16="http://schemas.microsoft.com/office/drawing/2014/main" id="{B597B1E1-4525-4458-3E47-D2B0FA499867}"/>
+                <a16:creationId xmlns:a16="http://schemas.microsoft.com/office/drawing/2014/main" id="{010E3DD1-0B97-E78A-5F45-78D4FC0E6A4C}"/>
               </a:ext>
             </a:extLst>
           </p:cNvPr>
@@ -7130,8 +7131,8 @@
         </p:blipFill>
         <p:spPr>
           <a:xfrm>
-            <a:off x="0" y="846101"/>
-            <a:ext cx="9144000" cy="3594174"/>
+            <a:off x="0" y="988778"/>
+            <a:ext cx="9144000" cy="3308819"/>
           </a:xfrm>
           <a:prstGeom prst="rect">
             <a:avLst/>
@@ -7152,6 +7153,118 @@
 </file>
 
 <file path=ppt/slides/slide16.xml><?xml version="1.0" encoding="utf-8"?>
+<p:sld xmlns:a="http://schemas.openxmlformats.org/drawingml/2006/main" xmlns:r="http://schemas.openxmlformats.org/officeDocument/2006/relationships" xmlns:p="http://schemas.openxmlformats.org/presentationml/2006/main">
+  <p:cSld>
+    <p:bg>
+      <p:bgPr>
+        <a:solidFill>
+          <a:srgbClr val="F8F9FA"/>
+        </a:solidFill>
+        <a:effectLst/>
+      </p:bgPr>
+    </p:bg>
+    <p:spTree>
+      <p:nvGrpSpPr>
+        <p:cNvPr id="1" name="">
+          <a:extLst>
+            <a:ext uri="{FF2B5EF4-FFF2-40B4-BE49-F238E27FC236}">
+              <a16:creationId xmlns:a16="http://schemas.microsoft.com/office/drawing/2014/main" id="{FB9E2A2C-E973-2822-A8C4-C9D743FDCD9A}"/>
+            </a:ext>
+          </a:extLst>
+        </p:cNvPr>
+        <p:cNvGrpSpPr/>
+        <p:nvPr/>
+      </p:nvGrpSpPr>
+      <p:grpSpPr>
+        <a:xfrm>
+          <a:off x="0" y="0"/>
+          <a:ext cx="0" cy="0"/>
+          <a:chOff x="0" y="0"/>
+          <a:chExt cx="0" cy="0"/>
+        </a:xfrm>
+      </p:grpSpPr>
+      <p:sp>
+        <p:nvSpPr>
+          <p:cNvPr id="5" name="CuadroTexto 4">
+            <a:extLst>
+              <a:ext uri="{FF2B5EF4-FFF2-40B4-BE49-F238E27FC236}">
+                <a16:creationId xmlns:a16="http://schemas.microsoft.com/office/drawing/2014/main" id="{169B776E-FE0D-2C7F-AB06-D24F375B3B27}"/>
+              </a:ext>
+            </a:extLst>
+          </p:cNvPr>
+          <p:cNvSpPr txBox="1"/>
+          <p:nvPr/>
+        </p:nvSpPr>
+        <p:spPr>
+          <a:xfrm>
+            <a:off x="1926166" y="88135"/>
+            <a:ext cx="5291667" cy="307777"/>
+          </a:xfrm>
+          <a:prstGeom prst="rect">
+            <a:avLst/>
+          </a:prstGeom>
+          <a:noFill/>
+        </p:spPr>
+        <p:txBody>
+          <a:bodyPr wrap="square" rtlCol="0">
+            <a:spAutoFit/>
+          </a:bodyPr>
+          <a:lstStyle/>
+          <a:p>
+            <a:pPr algn="ctr"/>
+            <a:r>
+              <a:rPr lang="es-MX" b="1" dirty="0">
+                <a:latin typeface="Montserrat" pitchFamily="2" charset="0"/>
+              </a:rPr>
+              <a:t>Opinión emitida por radioescuchas</a:t>
+            </a:r>
+          </a:p>
+        </p:txBody>
+      </p:sp>
+      <p:pic>
+        <p:nvPicPr>
+          <p:cNvPr id="4" name="Imagen 3">
+            <a:extLst>
+              <a:ext uri="{FF2B5EF4-FFF2-40B4-BE49-F238E27FC236}">
+                <a16:creationId xmlns:a16="http://schemas.microsoft.com/office/drawing/2014/main" id="{920B83E4-B1B0-E86A-E693-23E410AA5670}"/>
+              </a:ext>
+            </a:extLst>
+          </p:cNvPr>
+          <p:cNvPicPr>
+            <a:picLocks noChangeAspect="1"/>
+          </p:cNvPicPr>
+          <p:nvPr/>
+        </p:nvPicPr>
+        <p:blipFill>
+          <a:blip r:embed="rId2"/>
+          <a:stretch>
+            <a:fillRect/>
+          </a:stretch>
+        </p:blipFill>
+        <p:spPr>
+          <a:xfrm>
+            <a:off x="0" y="1191879"/>
+            <a:ext cx="9144000" cy="2902618"/>
+          </a:xfrm>
+          <a:prstGeom prst="rect">
+            <a:avLst/>
+          </a:prstGeom>
+        </p:spPr>
+      </p:pic>
+    </p:spTree>
+    <p:extLst>
+      <p:ext uri="{BB962C8B-B14F-4D97-AF65-F5344CB8AC3E}">
+        <p14:creationId xmlns:p14="http://schemas.microsoft.com/office/powerpoint/2010/main" val="1989408123"/>
+      </p:ext>
+    </p:extLst>
+  </p:cSld>
+  <p:clrMapOvr>
+    <a:masterClrMapping/>
+  </p:clrMapOvr>
+</p:sld>
+</file>
+
+<file path=ppt/slides/slide17.xml><?xml version="1.0" encoding="utf-8"?>
 <p:sld xmlns:a="http://schemas.openxmlformats.org/drawingml/2006/main" xmlns:r="http://schemas.openxmlformats.org/officeDocument/2006/relationships" xmlns:p="http://schemas.openxmlformats.org/presentationml/2006/main">
   <p:cSld>
     <p:spTree>
